--- a/decks/triple-light/triple-light_ch2_refraction.pptx
+++ b/decks/triple-light/triple-light_ch2_refraction.pptx
@@ -126,30 +126,30 @@
   <p:extLst>
     <p:ext uri="{521415D9-36F7-43E2-AB2F-B90AF26B5E84}">
       <p14:sectionLst xmlns:p14="http://schemas.microsoft.com/office/powerpoint/2010/main">
-        <p14:section name="Opening" id="{00404bd4-4c2d-494f-af93-93208555004a}">
+        <p14:section name="Opening" id="{3503dabf-1c4a-b4af-933a-d39ce72727fd}">
           <p14:sldIdLst>
             <p14:sldId id="256"/>
           </p14:sldIdLst>
         </p14:section>
-        <p14:section name="Gate" id="{5a91bd5a-dc72-8862-e294-c16a0ca2bb5f}">
+        <p14:section name="Gate" id="{46d393b8-fd97-339a-55ce-c9507fdac8c5}">
           <p14:sldIdLst>
             <p14:sldId id="257"/>
             <p14:sldId id="258"/>
           </p14:sldIdLst>
         </p14:section>
-        <p14:section name="Pre-teach" id="{17055a60-3a11-d81b-6283-83da18fcf7a5}">
+        <p14:section name="Pre-teach" id="{14c88563-ddd0-0473-5f4b-e5d72335d83a}">
           <p14:sldIdLst>
             <p14:sldId id="259"/>
             <p14:sldId id="260"/>
           </p14:sldIdLst>
         </p14:section>
-        <p14:section name="Read-along" id="{2385aa58-6754-7829-b002-f6aae3ae2ad9}">
+        <p14:section name="Read-along" id="{315ae288-13a0-b994-9770-7e1732fbfdc4}">
           <p14:sldIdLst>
             <p14:sldId id="261"/>
             <p14:sldId id="262"/>
           </p14:sldIdLst>
         </p14:section>
-        <p14:section name="Teach" id="{7f3ef9a0-83d9-a107-bce5-70fbbeac26c5}">
+        <p14:section name="Teach" id="{e746ea88-6d80-b7c1-3fcc-1610095d8936}">
           <p14:sldIdLst>
             <p14:sldId id="263"/>
             <p14:sldId id="264"/>
@@ -158,7 +158,7 @@
             <p14:sldId id="267"/>
           </p14:sldIdLst>
         </p14:section>
-        <p14:section name="Routes" id="{b9370986-511e-8550-a58d-c698f5474e10}">
+        <p14:section name="Routes" id="{3532588e-02ca-4750-d6d4-13316665276b}">
           <p14:sldIdLst>
             <p14:sldId id="268"/>
             <p14:sldId id="269"/>
@@ -166,12 +166,12 @@
             <p14:sldId id="271"/>
           </p14:sldIdLst>
         </p14:section>
-        <p14:section name="Close" id="{51680278-b252-7564-9178-a56c5c811154}">
+        <p14:section name="Close" id="{4377618c-948a-f35a-9da1-1383f199c268}">
           <p14:sldIdLst>
             <p14:sldId id="272"/>
           </p14:sldIdLst>
         </p14:section>
-        <p14:section name="Answers" id="{d4b3790c-49ec-7ece-8d92-31a2a2de60f0}">
+        <p14:section name="Answers" id="{427e298e-df59-8670-dfaa-fbf86282cf4a}">
           <p14:sldIdLst>
             <p14:sldId id="273"/>
             <p14:sldId id="274"/>
@@ -1325,7 +1325,7 @@
               <a:rPr lang="en-US" dirty="0"/>
               <a:t>Exit ticket — individual, silent, on a slip or mini-whiteboard. Recall before help: no notes, no lanes, no hints. Collect before pupils leave.
 Question: What is refraction?
-Answer: D   A change in direction of a wave as it crosses a boundary between two media. Refraction is the change in direction when a wave crosses a boundary, caused by the change in speed.
+Answer: B   A change in direction of a wave as it crosses a boundary between two media. Refraction is the change in direction when a wave crosses a boundary, caused by the change in speed.
 Source of this question: gate item 1 re-asked (options rotated) — this chapter has no third quick-check module.
 The ebook also holds task 3, "The refraction practical, step by step", for homework or the next lesson's do now.
 Sort the slips: correct → ready to move on; incorrect → start next lesson in the pre-teach group, with the read-along and the Support lane. Same destination next time.</a:t>
@@ -1417,7 +1417,7 @@
             <a:r>
               <a:rPr lang="en-US" dirty="0"/>
               <a:t>Answers — task 1: Out of the glass. Reveal the answer; pupils mark their own work in a different colour, then read the "why" together. Same destination for every lane, so one answer serves the whole class.
-Answer: A   It speeds up and bends away from the normal
+Answer: D   It speeds up and bends away from the normal
 Why: Leaving glass for air the light speeds up, so it bends away from the normal and the angle of refraction is bigger than the angle of incidence. It is the exact reverse of entering the glass.
 Ask a Support pupil to explain one step, and a Stretch pupil to share their extension.</a:t>
             </a:r>
@@ -1599,9 +1599,9 @@
             <a:r>
               <a:rPr lang="en-US" dirty="0"/>
               <a:t>Do now — retrieval. Silent, no notes, no help: recall comes before any support. Give about four minutes.
-1. What is refraction?  →  A   A change in direction of a wave as it crosses a boundary between two media
+1. What is refraction?  →  C   A change in direction of a wave as it crosses a boundary between two media
 2. When a ray of light passes from air into glass at an angle, it slows down and bends ___ the normal.  →  towards
-3. Which quantity does NOT change when light passes from air into glass?  →  A   Frequency
+3. Which quantity does NOT change when light passes from air into glass?  →  D   Frequency
 Circulate: who gets 3/3 (Stretch route), 2/3 (Core), 0–1 (Support)? Use this to route pupils later in the lesson.</a:t>
             </a:r>
             <a:endParaRPr lang="en-US" dirty="0"/>
@@ -1691,7 +1691,7 @@
             <a:r>
               <a:rPr lang="en-US" dirty="0"/>
               <a:t>Answers — exit ticket: Exit ticket. Reveal the answer; pupils mark their own work in a different colour, then read the "why" together. Same destination for every lane, so one answer serves the whole class.
-Answer: D   A change in direction of a wave as it crosses a boundary between two media
+Answer: B   A change in direction of a wave as it crosses a boundary between two media
 Why: Refraction is the change in direction when a wave crosses a boundary, caused by the change in speed.
 Ask a Support pupil to explain one step, and a Stretch pupil to share their extension.</a:t>
             </a:r>
@@ -1782,9 +1782,9 @@
             <a:r>
               <a:rPr lang="en-US" dirty="0"/>
               <a:t>Answers — pupils mark their own in a different colour, then hands up for 3/3, 2/3, 1/3.
-1. A   A change in direction of a wave as it crosses a boundary between two media. Refraction is the change in direction when a wave crosses a boundary, caused by the change in speed.
+1. C   A change in direction of a wave as it crosses a boundary between two media. Refraction is the change in direction when a wave crosses a boundary, caused by the change in speed.
 2. towards. Air to glass: the light slows down and bends towards the normal, so the angle of refraction is smaller than the angle of incidence.
-3. A   Frequency. Frequency is fixed by the source. Speed and wavelength both change, and the direction changes unless the ray is along the normal.
+3. D   Frequency. Frequency is fixed by the source. Speed and wavelength both change, and the direction changes unless the ray is along the normal.
 Say the route each score points to: 3/3 Stretch, 2/3 Core, 0–1 Support. Pupils may choose to move up.</a:t>
             </a:r>
             <a:endParaRPr lang="en-US" dirty="0"/>
@@ -6067,7 +6067,7 @@
                 <a:ea typeface="Calibri" pitchFamily="34" charset="-122"/>
                 <a:cs typeface="Calibri" pitchFamily="34" charset="-120"/>
               </a:rPr>
-              <a:t>It speeds up and bends away from the normal</a:t>
+              <a:t>It speeds up and bends towards the normal</a:t>
             </a:r>
             <a:endParaRPr lang="en-US" sz="2600" dirty="0"/>
           </a:p>
@@ -6104,7 +6104,7 @@
                 <a:ea typeface="Calibri" pitchFamily="34" charset="-122"/>
                 <a:cs typeface="Calibri" pitchFamily="34" charset="-120"/>
               </a:rPr>
-              <a:t>It slows down and bends towards the normal</a:t>
+              <a:t>It carries straight on with no change</a:t>
             </a:r>
             <a:endParaRPr lang="en-US" sz="2600" dirty="0"/>
           </a:p>
@@ -6141,7 +6141,7 @@
                 <a:ea typeface="Calibri" pitchFamily="34" charset="-122"/>
                 <a:cs typeface="Calibri" pitchFamily="34" charset="-120"/>
               </a:rPr>
-              <a:t>It speeds up and bends towards the normal</a:t>
+              <a:t>It slows down and bends towards the normal</a:t>
             </a:r>
             <a:endParaRPr lang="en-US" sz="2600" dirty="0"/>
           </a:p>
@@ -6178,7 +6178,7 @@
                 <a:ea typeface="Calibri" pitchFamily="34" charset="-122"/>
                 <a:cs typeface="Calibri" pitchFamily="34" charset="-120"/>
               </a:rPr>
-              <a:t>It carries straight on with no change</a:t>
+              <a:t>It speeds up and bends away from the normal</a:t>
             </a:r>
             <a:endParaRPr lang="en-US" sz="2600" dirty="0"/>
           </a:p>
@@ -9013,7 +9013,7 @@
                 <a:ea typeface="Calibri" pitchFamily="34" charset="-122"/>
                 <a:cs typeface="Calibri" pitchFamily="34" charset="-120"/>
               </a:rPr>
-              <a:t>A wave spreading out as it passes through a gap</a:t>
+              <a:t>A change in direction of a wave as it crosses a boundary between two media</a:t>
             </a:r>
             <a:endParaRPr lang="en-US" sz="2400" dirty="0"/>
           </a:p>
@@ -9087,7 +9087,7 @@
                 <a:ea typeface="Calibri" pitchFamily="34" charset="-122"/>
                 <a:cs typeface="Calibri" pitchFamily="34" charset="-120"/>
               </a:rPr>
-              <a:t>A change in direction of a wave as it crosses a boundary between two media</a:t>
+              <a:t>A wave spreading out as it passes through a gap</a:t>
             </a:r>
             <a:endParaRPr lang="en-US" sz="2400" dirty="0"/>
           </a:p>
@@ -9492,7 +9492,7 @@
                 <a:ea typeface="Cambria" pitchFamily="34" charset="-122"/>
                 <a:cs typeface="Cambria" pitchFamily="34" charset="-120"/>
               </a:rPr>
-              <a:t>A   It speeds up and bends away from the normal</a:t>
+              <a:t>D   It speeds up and bends away from the normal</a:t>
             </a:r>
             <a:endParaRPr lang="en-US" sz="1800" dirty="0"/>
           </a:p>
@@ -10485,7 +10485,7 @@
                 <a:ea typeface="Calibri" pitchFamily="34" charset="-122"/>
                 <a:cs typeface="Calibri" pitchFamily="34" charset="-120"/>
               </a:rPr>
-              <a:t>A change in direction of a wave as it crosses a boundary between two media</a:t>
+              <a:t>A wave spreading out as it passes through a gap</a:t>
             </a:r>
             <a:endParaRPr lang="en-US" sz="1800" dirty="0"/>
           </a:p>
@@ -10559,7 +10559,7 @@
                 <a:ea typeface="Calibri" pitchFamily="34" charset="-122"/>
                 <a:cs typeface="Calibri" pitchFamily="34" charset="-120"/>
               </a:rPr>
-              <a:t>A wave spreading out as it passes through a gap</a:t>
+              <a:t>A change in direction of a wave as it crosses a boundary between two media</a:t>
             </a:r>
             <a:endParaRPr lang="en-US" sz="1800" dirty="0"/>
           </a:p>
@@ -10998,7 +10998,7 @@
                 <a:ea typeface="Calibri" pitchFamily="34" charset="-122"/>
                 <a:cs typeface="Calibri" pitchFamily="34" charset="-120"/>
               </a:rPr>
-              <a:t>Frequency</a:t>
+              <a:t>Wavelength</a:t>
             </a:r>
             <a:endParaRPr lang="en-US" sz="2200" dirty="0"/>
           </a:p>
@@ -11072,7 +11072,7 @@
                 <a:ea typeface="Calibri" pitchFamily="34" charset="-122"/>
                 <a:cs typeface="Calibri" pitchFamily="34" charset="-120"/>
               </a:rPr>
-              <a:t>Wavelength</a:t>
+              <a:t>Direction, if it arrives at an angle</a:t>
             </a:r>
             <a:endParaRPr lang="en-US" sz="2200" dirty="0"/>
           </a:p>
@@ -11109,7 +11109,7 @@
                 <a:ea typeface="Calibri" pitchFamily="34" charset="-122"/>
                 <a:cs typeface="Calibri" pitchFamily="34" charset="-120"/>
               </a:rPr>
-              <a:t>Direction, if it arrives at an angle</a:t>
+              <a:t>Frequency</a:t>
             </a:r>
             <a:endParaRPr lang="en-US" sz="2200" dirty="0"/>
           </a:p>
@@ -11448,7 +11448,7 @@
                 <a:ea typeface="Cambria" pitchFamily="34" charset="-122"/>
                 <a:cs typeface="Cambria" pitchFamily="34" charset="-120"/>
               </a:rPr>
-              <a:t>D   A change in direction of a wave as it crosses a boundary between two media</a:t>
+              <a:t>B   A change in direction of a wave as it crosses a boundary between two media</a:t>
             </a:r>
             <a:endParaRPr lang="en-US" sz="1800" dirty="0"/>
           </a:p>
@@ -11969,7 +11969,7 @@
                 <a:ea typeface="Calibri" pitchFamily="34" charset="-122"/>
                 <a:cs typeface="Calibri" pitchFamily="34" charset="-120"/>
               </a:rPr>
-              <a:t>A   A change in direction of a wave as it crosses a boundary between two media</a:t>
+              <a:t>C   A change in direction of a wave as it crosses a boundary between two media</a:t>
             </a:r>
             <a:endParaRPr lang="en-US" sz="2200" dirty="0"/>
           </a:p>
@@ -12469,7 +12469,7 @@
                 <a:ea typeface="Calibri" pitchFamily="34" charset="-122"/>
                 <a:cs typeface="Calibri" pitchFamily="34" charset="-120"/>
               </a:rPr>
-              <a:t>A   Frequency</a:t>
+              <a:t>D   Frequency</a:t>
             </a:r>
             <a:endParaRPr lang="en-US" sz="2200" dirty="0"/>
           </a:p>

--- a/decks/triple-light/triple-light_ch2_refraction.pptx
+++ b/decks/triple-light/triple-light_ch2_refraction.pptx
@@ -126,30 +126,30 @@
   <p:extLst>
     <p:ext uri="{521415D9-36F7-43E2-AB2F-B90AF26B5E84}">
       <p14:sectionLst xmlns:p14="http://schemas.microsoft.com/office/powerpoint/2010/main">
-        <p14:section name="Opening" id="{3503dabf-1c4a-b4af-933a-d39ce72727fd}">
+        <p14:section name="Opening" id="{0a6d8575-a828-1d7a-93e9-0576fd1c5eca}">
           <p14:sldIdLst>
             <p14:sldId id="256"/>
           </p14:sldIdLst>
         </p14:section>
-        <p14:section name="Gate" id="{46d393b8-fd97-339a-55ce-c9507fdac8c5}">
+        <p14:section name="Gate" id="{857b6ad5-9d5e-e3c9-ebe4-166e58825216}">
           <p14:sldIdLst>
             <p14:sldId id="257"/>
             <p14:sldId id="258"/>
           </p14:sldIdLst>
         </p14:section>
-        <p14:section name="Pre-teach" id="{14c88563-ddd0-0473-5f4b-e5d72335d83a}">
+        <p14:section name="Pre-teach" id="{c4824a7b-c88a-d967-d7f0-ee4a45a2fff5}">
           <p14:sldIdLst>
             <p14:sldId id="259"/>
             <p14:sldId id="260"/>
           </p14:sldIdLst>
         </p14:section>
-        <p14:section name="Read-along" id="{315ae288-13a0-b994-9770-7e1732fbfdc4}">
+        <p14:section name="Read-along" id="{258c61aa-910f-1ef0-5fec-f3d565814634}">
           <p14:sldIdLst>
             <p14:sldId id="261"/>
             <p14:sldId id="262"/>
           </p14:sldIdLst>
         </p14:section>
-        <p14:section name="Teach" id="{e746ea88-6d80-b7c1-3fcc-1610095d8936}">
+        <p14:section name="Teach" id="{baf1b672-6d07-e6ad-ae1e-3454093fc171}">
           <p14:sldIdLst>
             <p14:sldId id="263"/>
             <p14:sldId id="264"/>
@@ -158,7 +158,7 @@
             <p14:sldId id="267"/>
           </p14:sldIdLst>
         </p14:section>
-        <p14:section name="Routes" id="{3532588e-02ca-4750-d6d4-13316665276b}">
+        <p14:section name="Routes" id="{f3a95160-f732-e084-8dd2-a29440370e0b}">
           <p14:sldIdLst>
             <p14:sldId id="268"/>
             <p14:sldId id="269"/>
@@ -166,12 +166,12 @@
             <p14:sldId id="271"/>
           </p14:sldIdLst>
         </p14:section>
-        <p14:section name="Close" id="{4377618c-948a-f35a-9da1-1383f199c268}">
+        <p14:section name="Close" id="{eaca152d-d955-16bf-c535-d72049ae649c}">
           <p14:sldIdLst>
             <p14:sldId id="272"/>
           </p14:sldIdLst>
         </p14:section>
-        <p14:section name="Answers" id="{427e298e-df59-8670-dfaa-fbf86282cf4a}">
+        <p14:section name="Answers" id="{651ea7f0-15df-c3aa-70f0-1f99ab296a96}">
           <p14:sldIdLst>
             <p14:sldId id="273"/>
             <p14:sldId id="274"/>
